--- a/Maths project.pptx
+++ b/Maths project.pptx
@@ -133,8 +133,8 @@
 <pc:chgInfo xmlns:a="http://schemas.openxmlformats.org/drawingml/2006/main" xmlns:r="http://schemas.openxmlformats.org/officeDocument/2006/relationships" xmlns:ac="http://schemas.microsoft.com/office/drawing/2013/main/command" xmlns:pc="http://schemas.microsoft.com/office/powerpoint/2013/main/command">
   <pc:docChgLst>
     <pc:chgData name="ANNAM CHANDANA REDDY" userId="9343605f2fdae285" providerId="LiveId" clId="{AFE4850C-F665-4809-9F17-7A9CA732769B}"/>
-    <pc:docChg chg="modSld">
-      <pc:chgData name="ANNAM CHANDANA REDDY" userId="9343605f2fdae285" providerId="LiveId" clId="{AFE4850C-F665-4809-9F17-7A9CA732769B}" dt="2026-05-28T05:23:43.317" v="15"/>
+    <pc:docChg chg="custSel modSld">
+      <pc:chgData name="ANNAM CHANDANA REDDY" userId="9343605f2fdae285" providerId="LiveId" clId="{AFE4850C-F665-4809-9F17-7A9CA732769B}" dt="2026-05-28T05:31:53.967" v="89" actId="20577"/>
       <pc:docMkLst>
         <pc:docMk/>
       </pc:docMkLst>
@@ -152,6 +152,21 @@
             <ac:graphicFrameMk id="31" creationId="{613FC9B6-ED9E-4F51-A217-156DA01928CD}"/>
           </ac:graphicFrameMkLst>
         </pc:graphicFrameChg>
+      </pc:sldChg>
+      <pc:sldChg chg="modSp mod">
+        <pc:chgData name="ANNAM CHANDANA REDDY" userId="9343605f2fdae285" providerId="LiveId" clId="{AFE4850C-F665-4809-9F17-7A9CA732769B}" dt="2026-05-28T05:31:53.967" v="89" actId="20577"/>
+        <pc:sldMkLst>
+          <pc:docMk/>
+          <pc:sldMk cId="2894722654" sldId="296"/>
+        </pc:sldMkLst>
+        <pc:spChg chg="mod">
+          <ac:chgData name="ANNAM CHANDANA REDDY" userId="9343605f2fdae285" providerId="LiveId" clId="{AFE4850C-F665-4809-9F17-7A9CA732769B}" dt="2026-05-28T05:31:53.967" v="89" actId="20577"/>
+          <ac:spMkLst>
+            <pc:docMk/>
+            <pc:sldMk cId="2894722654" sldId="296"/>
+            <ac:spMk id="3" creationId="{004BBEA5-91A1-60AB-E573-A999695F3E81}"/>
+          </ac:spMkLst>
+        </pc:spChg>
       </pc:sldChg>
       <pc:sldChg chg="addSp delSp modSp mod">
         <pc:chgData name="ANNAM CHANDANA REDDY" userId="9343605f2fdae285" providerId="LiveId" clId="{AFE4850C-F665-4809-9F17-7A9CA732769B}" dt="2026-05-28T05:23:43.317" v="15"/>
@@ -8706,16 +8721,20 @@
           <a:p>
             <a:pPr algn="ctr"/>
             <a:r>
+              <a:rPr lang="en-US" dirty="0" err="1"/>
+              <a:t>Moinabad</a:t>
+            </a:r>
+            <a:r>
               <a:rPr lang="en-US" dirty="0"/>
-              <a:t>Green Fields, </a:t>
+              <a:t> Road, </a:t>
             </a:r>
             <a:r>
               <a:rPr lang="en-US" dirty="0" err="1"/>
-              <a:t>Vaddeswaram</a:t>
+              <a:t>Aziznagar</a:t>
             </a:r>
             <a:r>
               <a:rPr lang="en-US" dirty="0"/>
-              <a:t>, Guntur District-522 502</a:t>
+              <a:t> , Hyderabad , 500075.</a:t>
             </a:r>
             <a:br>
               <a:rPr lang="en-US" dirty="0"/>
@@ -8925,8 +8944,8 @@
           </a:p>
         </p:txBody>
       </p:sp>
-      <mc:AlternateContent xmlns:mc="http://schemas.openxmlformats.org/markup-compatibility/2006">
-        <mc:Choice xmlns:p14="http://schemas.microsoft.com/office/powerpoint/2010/main" Requires="p14">
+      <mc:AlternateContent xmlns:mc="http://schemas.openxmlformats.org/markup-compatibility/2006" xmlns:p14="http://schemas.microsoft.com/office/powerpoint/2010/main">
+        <mc:Choice Requires="p14">
           <p:contentPart p14:bwMode="auto" r:id="rId2">
             <p14:nvContentPartPr>
               <p14:cNvPr id="10" name="Ink 9">
@@ -8945,7 +8964,7 @@
             </p14:xfrm>
           </p:contentPart>
         </mc:Choice>
-        <mc:Fallback>
+        <mc:Fallback xmlns="">
           <p:pic>
             <p:nvPicPr>
               <p:cNvPr id="10" name="Ink 9">
@@ -10229,21 +10248,21 @@
 </file>
 
 <file path=customXml/item1.xml><?xml version="1.0" encoding="utf-8"?>
+<?mso-contentType ?>
+<FormTemplates xmlns="http://schemas.microsoft.com/sharepoint/v3/contenttype/forms">
+  <Display>DocumentLibraryForm</Display>
+  <Edit>DocumentLibraryForm</Edit>
+  <New>DocumentLibraryForm</New>
+</FormTemplates>
+</file>
+
+<file path=customXml/item2.xml><?xml version="1.0" encoding="utf-8"?>
 <p:properties xmlns:p="http://schemas.microsoft.com/office/2006/metadata/properties" xmlns:xsi="http://www.w3.org/2001/XMLSchema-instance" xmlns:pc="http://schemas.microsoft.com/office/infopath/2007/PartnerControls">
   <documentManagement>
     <Status xmlns="71af3243-3dd4-4a8d-8c0d-dd76da1f02a5">Not started</Status>
     <MediaServiceKeyPoints xmlns="71af3243-3dd4-4a8d-8c0d-dd76da1f02a5" xsi:nil="true"/>
   </documentManagement>
 </p:properties>
-</file>
-
-<file path=customXml/item2.xml><?xml version="1.0" encoding="utf-8"?>
-<?mso-contentType ?>
-<FormTemplates xmlns="http://schemas.microsoft.com/sharepoint/v3/contenttype/forms">
-  <Display>DocumentLibraryForm</Display>
-  <Edit>DocumentLibraryForm</Edit>
-  <New>DocumentLibraryForm</New>
-</FormTemplates>
 </file>
 
 <file path=customXml/item3.xml><?xml version="1.0" encoding="utf-8"?>
@@ -10468,19 +10487,19 @@
 </file>
 
 <file path=customXml/itemProps1.xml><?xml version="1.0" encoding="utf-8"?>
+<ds:datastoreItem xmlns:ds="http://schemas.openxmlformats.org/officeDocument/2006/customXml" ds:itemID="{294F055B-D391-44D3-A87A-BCD07BD5A31C}">
+  <ds:schemaRefs>
+    <ds:schemaRef ds:uri="http://schemas.microsoft.com/sharepoint/v3/contenttype/forms"/>
+  </ds:schemaRefs>
+</ds:datastoreItem>
+</file>
+
+<file path=customXml/itemProps2.xml><?xml version="1.0" encoding="utf-8"?>
 <ds:datastoreItem xmlns:ds="http://schemas.openxmlformats.org/officeDocument/2006/customXml" ds:itemID="{B975FBC4-9D33-46BE-911D-419763BA9AF9}">
   <ds:schemaRefs>
     <ds:schemaRef ds:uri="http://schemas.microsoft.com/office/2006/metadata/properties"/>
     <ds:schemaRef ds:uri="http://schemas.microsoft.com/office/infopath/2007/PartnerControls"/>
     <ds:schemaRef ds:uri="71af3243-3dd4-4a8d-8c0d-dd76da1f02a5"/>
-  </ds:schemaRefs>
-</ds:datastoreItem>
-</file>
-
-<file path=customXml/itemProps2.xml><?xml version="1.0" encoding="utf-8"?>
-<ds:datastoreItem xmlns:ds="http://schemas.openxmlformats.org/officeDocument/2006/customXml" ds:itemID="{294F055B-D391-44D3-A87A-BCD07BD5A31C}">
-  <ds:schemaRefs>
-    <ds:schemaRef ds:uri="http://schemas.microsoft.com/sharepoint/v3/contenttype/forms"/>
   </ds:schemaRefs>
 </ds:datastoreItem>
 </file>
